--- a/assets/powerpoints/module-nouvelles/B2-expliquer-un-mot-dans-ses-mots.pptx
+++ b/assets/powerpoints/module-nouvelles/B2-expliquer-un-mot-dans-ses-mots.pptx
@@ -4578,7 +4578,7 @@
                 </a:solidFill>
                 <a:latin typeface="Verdana"/>
               </a:rPr>
-              <a:t>SÉANCE B2  ·  MODULE 5</a:t>
+              <a:t>SÉANCE B2  ·  MODULE 6</a:t>
             </a:r>
           </a:p>
         </p:txBody>

--- a/assets/powerpoints/module-nouvelles/B2-expliquer-un-mot-dans-ses-mots.pptx
+++ b/assets/powerpoints/module-nouvelles/B2-expliquer-un-mot-dans-ses-mots.pptx
@@ -4574,7 +4574,7 @@
             <a:r>
               <a:rPr sz="1300" b="1" i="0" spc="156">
                 <a:solidFill>
-                  <a:srgbClr val="166534"/>
+                  <a:srgbClr val="A5335F"/>
                 </a:solidFill>
                 <a:latin typeface="Verdana"/>
               </a:rPr>
@@ -4914,7 +4914,7 @@
             <a:r>
               <a:rPr sz="1300" b="1" i="0" spc="156">
                 <a:solidFill>
-                  <a:srgbClr val="166534"/>
+                  <a:srgbClr val="A5335F"/>
                 </a:solidFill>
                 <a:latin typeface="Verdana"/>
               </a:rPr>
@@ -5463,7 +5463,7 @@
             <a:r>
               <a:rPr sz="1300" b="1" i="0" spc="156">
                 <a:solidFill>
-                  <a:srgbClr val="166534"/>
+                  <a:srgbClr val="A5335F"/>
                 </a:solidFill>
                 <a:latin typeface="Verdana"/>
               </a:rPr>
@@ -6012,7 +6012,7 @@
             <a:r>
               <a:rPr sz="1300" b="1" i="0" spc="156">
                 <a:solidFill>
-                  <a:srgbClr val="166534"/>
+                  <a:srgbClr val="A5335F"/>
                 </a:solidFill>
                 <a:latin typeface="Verdana"/>
               </a:rPr>
@@ -6162,7 +6162,7 @@
             </a:avLst>
           </a:prstGeom>
           <a:solidFill>
-            <a:srgbClr val="E3F1E7"/>
+            <a:srgbClr val="FCE9F0"/>
           </a:solidFill>
           <a:ln>
             <a:noFill/>
@@ -6219,7 +6219,7 @@
             <a:r>
               <a:rPr sz="1500" b="1" i="0">
                 <a:solidFill>
-                  <a:srgbClr val="166534"/>
+                  <a:srgbClr val="A5335F"/>
                 </a:solidFill>
                 <a:latin typeface="Verdana"/>
               </a:rPr>
@@ -6330,7 +6330,7 @@
             </a:avLst>
           </a:prstGeom>
           <a:solidFill>
-            <a:srgbClr val="E3F1E7"/>
+            <a:srgbClr val="FCE9F0"/>
           </a:solidFill>
           <a:ln>
             <a:noFill/>
@@ -6387,7 +6387,7 @@
             <a:r>
               <a:rPr sz="1500" b="1" i="0">
                 <a:solidFill>
-                  <a:srgbClr val="166534"/>
+                  <a:srgbClr val="A5335F"/>
                 </a:solidFill>
                 <a:latin typeface="Verdana"/>
               </a:rPr>
@@ -6498,7 +6498,7 @@
             </a:avLst>
           </a:prstGeom>
           <a:solidFill>
-            <a:srgbClr val="E3F1E7"/>
+            <a:srgbClr val="FCE9F0"/>
           </a:solidFill>
           <a:ln>
             <a:noFill/>
@@ -6555,7 +6555,7 @@
             <a:r>
               <a:rPr sz="1500" b="1" i="0">
                 <a:solidFill>
-                  <a:srgbClr val="166534"/>
+                  <a:srgbClr val="A5335F"/>
                 </a:solidFill>
                 <a:latin typeface="Verdana"/>
               </a:rPr>
@@ -6666,7 +6666,7 @@
             </a:avLst>
           </a:prstGeom>
           <a:solidFill>
-            <a:srgbClr val="E3F1E7"/>
+            <a:srgbClr val="FCE9F0"/>
           </a:solidFill>
           <a:ln>
             <a:noFill/>
@@ -6723,7 +6723,7 @@
             <a:r>
               <a:rPr sz="1500" b="1" i="0">
                 <a:solidFill>
-                  <a:srgbClr val="166534"/>
+                  <a:srgbClr val="A5335F"/>
                 </a:solidFill>
                 <a:latin typeface="Verdana"/>
               </a:rPr>
@@ -6939,7 +6939,7 @@
             <a:r>
               <a:rPr sz="1300" b="1" i="0" spc="156">
                 <a:solidFill>
-                  <a:srgbClr val="166534"/>
+                  <a:srgbClr val="A5335F"/>
                 </a:solidFill>
                 <a:latin typeface="Verdana"/>
               </a:rPr>
@@ -7089,7 +7089,7 @@
             </a:avLst>
           </a:prstGeom>
           <a:solidFill>
-            <a:srgbClr val="E3F1E7"/>
+            <a:srgbClr val="FCE9F0"/>
           </a:solidFill>
           <a:ln>
             <a:noFill/>
@@ -7146,7 +7146,7 @@
             <a:r>
               <a:rPr sz="1500" b="1" i="0">
                 <a:solidFill>
-                  <a:srgbClr val="166534"/>
+                  <a:srgbClr val="A5335F"/>
                 </a:solidFill>
                 <a:latin typeface="Verdana"/>
               </a:rPr>
@@ -7257,7 +7257,7 @@
             </a:avLst>
           </a:prstGeom>
           <a:solidFill>
-            <a:srgbClr val="E3F1E7"/>
+            <a:srgbClr val="FCE9F0"/>
           </a:solidFill>
           <a:ln>
             <a:noFill/>
@@ -7314,7 +7314,7 @@
             <a:r>
               <a:rPr sz="1500" b="1" i="0">
                 <a:solidFill>
-                  <a:srgbClr val="166534"/>
+                  <a:srgbClr val="A5335F"/>
                 </a:solidFill>
                 <a:latin typeface="Verdana"/>
               </a:rPr>
@@ -7425,7 +7425,7 @@
             </a:avLst>
           </a:prstGeom>
           <a:solidFill>
-            <a:srgbClr val="E3F1E7"/>
+            <a:srgbClr val="FCE9F0"/>
           </a:solidFill>
           <a:ln>
             <a:noFill/>
@@ -7482,7 +7482,7 @@
             <a:r>
               <a:rPr sz="1500" b="1" i="0">
                 <a:solidFill>
-                  <a:srgbClr val="166534"/>
+                  <a:srgbClr val="A5335F"/>
                 </a:solidFill>
                 <a:latin typeface="Verdana"/>
               </a:rPr>
@@ -7593,7 +7593,7 @@
             </a:avLst>
           </a:prstGeom>
           <a:solidFill>
-            <a:srgbClr val="E3F1E7"/>
+            <a:srgbClr val="FCE9F0"/>
           </a:solidFill>
           <a:ln>
             <a:noFill/>
@@ -7650,7 +7650,7 @@
             <a:r>
               <a:rPr sz="1500" b="1" i="0">
                 <a:solidFill>
-                  <a:srgbClr val="166534"/>
+                  <a:srgbClr val="A5335F"/>
                 </a:solidFill>
                 <a:latin typeface="Verdana"/>
               </a:rPr>
@@ -7866,7 +7866,7 @@
             <a:r>
               <a:rPr sz="1300" b="1" i="0" spc="156">
                 <a:solidFill>
-                  <a:srgbClr val="166534"/>
+                  <a:srgbClr val="A5335F"/>
                 </a:solidFill>
                 <a:latin typeface="Verdana"/>
               </a:rPr>
@@ -8016,7 +8016,7 @@
             </a:avLst>
           </a:prstGeom>
           <a:solidFill>
-            <a:srgbClr val="E3F1E7"/>
+            <a:srgbClr val="FCE9F0"/>
           </a:solidFill>
           <a:ln>
             <a:noFill/>
@@ -8073,7 +8073,7 @@
             <a:r>
               <a:rPr sz="1500" b="1" i="0">
                 <a:solidFill>
-                  <a:srgbClr val="166534"/>
+                  <a:srgbClr val="A5335F"/>
                 </a:solidFill>
                 <a:latin typeface="Verdana"/>
               </a:rPr>
@@ -8193,7 +8193,7 @@
             </a:avLst>
           </a:prstGeom>
           <a:solidFill>
-            <a:srgbClr val="E3F1E7"/>
+            <a:srgbClr val="FCE9F0"/>
           </a:solidFill>
           <a:ln>
             <a:noFill/>
@@ -8250,7 +8250,7 @@
             <a:r>
               <a:rPr sz="1500" b="1" i="0">
                 <a:solidFill>
-                  <a:srgbClr val="166534"/>
+                  <a:srgbClr val="A5335F"/>
                 </a:solidFill>
                 <a:latin typeface="Verdana"/>
               </a:rPr>
@@ -8370,7 +8370,7 @@
             </a:avLst>
           </a:prstGeom>
           <a:solidFill>
-            <a:srgbClr val="E3F1E7"/>
+            <a:srgbClr val="FCE9F0"/>
           </a:solidFill>
           <a:ln>
             <a:noFill/>
@@ -8427,7 +8427,7 @@
             <a:r>
               <a:rPr sz="1500" b="1" i="0">
                 <a:solidFill>
-                  <a:srgbClr val="166534"/>
+                  <a:srgbClr val="A5335F"/>
                 </a:solidFill>
                 <a:latin typeface="Verdana"/>
               </a:rPr>
@@ -8547,7 +8547,7 @@
             </a:avLst>
           </a:prstGeom>
           <a:solidFill>
-            <a:srgbClr val="E3F1E7"/>
+            <a:srgbClr val="FCE9F0"/>
           </a:solidFill>
           <a:ln>
             <a:noFill/>
@@ -8604,7 +8604,7 @@
             <a:r>
               <a:rPr sz="1500" b="1" i="0">
                 <a:solidFill>
-                  <a:srgbClr val="166534"/>
+                  <a:srgbClr val="A5335F"/>
                 </a:solidFill>
                 <a:latin typeface="Verdana"/>
               </a:rPr>
@@ -9292,7 +9292,7 @@
             <a:r>
               <a:rPr sz="1300" b="1" i="0" spc="156">
                 <a:solidFill>
-                  <a:srgbClr val="166534"/>
+                  <a:srgbClr val="A5335F"/>
                 </a:solidFill>
                 <a:latin typeface="Verdana"/>
               </a:rPr>
@@ -9403,7 +9403,7 @@
             </a:avLst>
           </a:prstGeom>
           <a:solidFill>
-            <a:srgbClr val="E3F1E7"/>
+            <a:srgbClr val="FCE9F0"/>
           </a:solidFill>
           <a:ln>
             <a:noFill/>
@@ -9460,7 +9460,7 @@
             <a:r>
               <a:rPr sz="1500" b="1" i="0">
                 <a:solidFill>
-                  <a:srgbClr val="166534"/>
+                  <a:srgbClr val="A5335F"/>
                 </a:solidFill>
                 <a:latin typeface="Verdana"/>
               </a:rPr>
@@ -9571,7 +9571,7 @@
             </a:avLst>
           </a:prstGeom>
           <a:solidFill>
-            <a:srgbClr val="E3F1E7"/>
+            <a:srgbClr val="FCE9F0"/>
           </a:solidFill>
           <a:ln>
             <a:noFill/>
@@ -9628,7 +9628,7 @@
             <a:r>
               <a:rPr sz="1500" b="1" i="0">
                 <a:solidFill>
-                  <a:srgbClr val="166534"/>
+                  <a:srgbClr val="A5335F"/>
                 </a:solidFill>
                 <a:latin typeface="Verdana"/>
               </a:rPr>
@@ -9739,7 +9739,7 @@
             </a:avLst>
           </a:prstGeom>
           <a:solidFill>
-            <a:srgbClr val="E3F1E7"/>
+            <a:srgbClr val="FCE9F0"/>
           </a:solidFill>
           <a:ln>
             <a:noFill/>
@@ -9796,7 +9796,7 @@
             <a:r>
               <a:rPr sz="1500" b="1" i="0">
                 <a:solidFill>
-                  <a:srgbClr val="166534"/>
+                  <a:srgbClr val="A5335F"/>
                 </a:solidFill>
                 <a:latin typeface="Verdana"/>
               </a:rPr>
@@ -9907,7 +9907,7 @@
             </a:avLst>
           </a:prstGeom>
           <a:solidFill>
-            <a:srgbClr val="E3F1E7"/>
+            <a:srgbClr val="FCE9F0"/>
           </a:solidFill>
           <a:ln>
             <a:noFill/>
@@ -9964,7 +9964,7 @@
             <a:r>
               <a:rPr sz="1500" b="1" i="0">
                 <a:solidFill>
-                  <a:srgbClr val="166534"/>
+                  <a:srgbClr val="A5335F"/>
                 </a:solidFill>
                 <a:latin typeface="Verdana"/>
               </a:rPr>
@@ -10180,7 +10180,7 @@
             <a:r>
               <a:rPr sz="1300" b="1" i="0" spc="156">
                 <a:solidFill>
-                  <a:srgbClr val="166534"/>
+                  <a:srgbClr val="A5335F"/>
                 </a:solidFill>
                 <a:latin typeface="Verdana"/>
               </a:rPr>
@@ -10382,7 +10382,7 @@
             <a:r>
               <a:rPr sz="1800" b="1" i="0">
                 <a:solidFill>
-                  <a:srgbClr val="166534"/>
+                  <a:srgbClr val="A5335F"/>
                 </a:solidFill>
                 <a:latin typeface="Verdana"/>
               </a:rPr>
@@ -10502,7 +10502,7 @@
             <a:r>
               <a:rPr sz="1800" b="1" i="0">
                 <a:solidFill>
-                  <a:srgbClr val="166534"/>
+                  <a:srgbClr val="A5335F"/>
                 </a:solidFill>
                 <a:latin typeface="Verdana"/>
               </a:rPr>
@@ -10622,7 +10622,7 @@
             <a:r>
               <a:rPr sz="1800" b="1" i="0">
                 <a:solidFill>
-                  <a:srgbClr val="166534"/>
+                  <a:srgbClr val="A5335F"/>
                 </a:solidFill>
                 <a:latin typeface="Verdana"/>
               </a:rPr>
@@ -10742,7 +10742,7 @@
             <a:r>
               <a:rPr sz="1800" b="1" i="0">
                 <a:solidFill>
-                  <a:srgbClr val="166534"/>
+                  <a:srgbClr val="A5335F"/>
                 </a:solidFill>
                 <a:latin typeface="Verdana"/>
               </a:rPr>
@@ -11043,7 +11043,7 @@
             <a:r>
               <a:rPr sz="1300" b="1" i="0" spc="156">
                 <a:solidFill>
-                  <a:srgbClr val="166534"/>
+                  <a:srgbClr val="A5335F"/>
                 </a:solidFill>
                 <a:latin typeface="Verdana"/>
               </a:rPr>
@@ -11069,7 +11069,7 @@
             </a:avLst>
           </a:prstGeom>
           <a:solidFill>
-            <a:srgbClr val="E3F1E7"/>
+            <a:srgbClr val="FCE9F0"/>
           </a:solidFill>
           <a:ln w="12700">
             <a:solidFill>
@@ -11390,7 +11390,7 @@
             <a:r>
               <a:rPr sz="1300" b="1" i="0" spc="156">
                 <a:solidFill>
-                  <a:srgbClr val="166534"/>
+                  <a:srgbClr val="A5335F"/>
                 </a:solidFill>
                 <a:latin typeface="Verdana"/>
               </a:rPr>
@@ -11514,7 +11514,7 @@
             <a:r>
               <a:rPr sz="2400" b="1" i="0">
                 <a:solidFill>
-                  <a:srgbClr val="166534"/>
+                  <a:srgbClr val="A5335F"/>
                 </a:solidFill>
                 <a:latin typeface="Verdana"/>
               </a:rPr>
@@ -11638,7 +11638,7 @@
             <a:r>
               <a:rPr sz="2400" b="1" i="0">
                 <a:solidFill>
-                  <a:srgbClr val="166534"/>
+                  <a:srgbClr val="A5335F"/>
                 </a:solidFill>
                 <a:latin typeface="Verdana"/>
               </a:rPr>
@@ -11762,7 +11762,7 @@
             <a:r>
               <a:rPr sz="2400" b="1" i="0">
                 <a:solidFill>
-                  <a:srgbClr val="166534"/>
+                  <a:srgbClr val="A5335F"/>
                 </a:solidFill>
                 <a:latin typeface="Verdana"/>
               </a:rPr>
@@ -11886,7 +11886,7 @@
             <a:r>
               <a:rPr sz="2400" b="1" i="0">
                 <a:solidFill>
-                  <a:srgbClr val="166534"/>
+                  <a:srgbClr val="A5335F"/>
                 </a:solidFill>
                 <a:latin typeface="Verdana"/>
               </a:rPr>
@@ -12102,7 +12102,7 @@
             <a:r>
               <a:rPr sz="1300" b="1" i="0" spc="156">
                 <a:solidFill>
-                  <a:srgbClr val="166534"/>
+                  <a:srgbClr val="A5335F"/>
                 </a:solidFill>
                 <a:latin typeface="Verdana"/>
               </a:rPr>
@@ -12252,7 +12252,7 @@
             </a:avLst>
           </a:prstGeom>
           <a:solidFill>
-            <a:srgbClr val="E3F1E7"/>
+            <a:srgbClr val="FCE9F0"/>
           </a:solidFill>
           <a:ln>
             <a:noFill/>
@@ -12309,7 +12309,7 @@
             <a:r>
               <a:rPr sz="1500" b="1" i="0">
                 <a:solidFill>
-                  <a:srgbClr val="166534"/>
+                  <a:srgbClr val="A5335F"/>
                 </a:solidFill>
                 <a:latin typeface="Verdana"/>
               </a:rPr>
@@ -12420,7 +12420,7 @@
             </a:avLst>
           </a:prstGeom>
           <a:solidFill>
-            <a:srgbClr val="E3F1E7"/>
+            <a:srgbClr val="FCE9F0"/>
           </a:solidFill>
           <a:ln>
             <a:noFill/>
@@ -12477,7 +12477,7 @@
             <a:r>
               <a:rPr sz="1500" b="1" i="0">
                 <a:solidFill>
-                  <a:srgbClr val="166534"/>
+                  <a:srgbClr val="A5335F"/>
                 </a:solidFill>
                 <a:latin typeface="Verdana"/>
               </a:rPr>
@@ -12588,7 +12588,7 @@
             </a:avLst>
           </a:prstGeom>
           <a:solidFill>
-            <a:srgbClr val="E3F1E7"/>
+            <a:srgbClr val="FCE9F0"/>
           </a:solidFill>
           <a:ln>
             <a:noFill/>
@@ -12645,7 +12645,7 @@
             <a:r>
               <a:rPr sz="1500" b="1" i="0">
                 <a:solidFill>
-                  <a:srgbClr val="166534"/>
+                  <a:srgbClr val="A5335F"/>
                 </a:solidFill>
                 <a:latin typeface="Verdana"/>
               </a:rPr>
@@ -12756,7 +12756,7 @@
             </a:avLst>
           </a:prstGeom>
           <a:solidFill>
-            <a:srgbClr val="E3F1E7"/>
+            <a:srgbClr val="FCE9F0"/>
           </a:solidFill>
           <a:ln>
             <a:noFill/>
@@ -12813,7 +12813,7 @@
             <a:r>
               <a:rPr sz="1500" b="1" i="0">
                 <a:solidFill>
-                  <a:srgbClr val="166534"/>
+                  <a:srgbClr val="A5335F"/>
                 </a:solidFill>
                 <a:latin typeface="Verdana"/>
               </a:rPr>
@@ -13029,7 +13029,7 @@
             <a:r>
               <a:rPr sz="1300" b="1" i="0" spc="156">
                 <a:solidFill>
-                  <a:srgbClr val="166534"/>
+                  <a:srgbClr val="A5335F"/>
                 </a:solidFill>
                 <a:latin typeface="Verdana"/>
               </a:rPr>
@@ -13179,7 +13179,7 @@
             </a:avLst>
           </a:prstGeom>
           <a:solidFill>
-            <a:srgbClr val="E3F1E7"/>
+            <a:srgbClr val="FCE9F0"/>
           </a:solidFill>
           <a:ln>
             <a:noFill/>
@@ -13236,7 +13236,7 @@
             <a:r>
               <a:rPr sz="1500" b="1" i="0">
                 <a:solidFill>
-                  <a:srgbClr val="166534"/>
+                  <a:srgbClr val="A5335F"/>
                 </a:solidFill>
                 <a:latin typeface="Verdana"/>
               </a:rPr>
@@ -13356,7 +13356,7 @@
             </a:avLst>
           </a:prstGeom>
           <a:solidFill>
-            <a:srgbClr val="E3F1E7"/>
+            <a:srgbClr val="FCE9F0"/>
           </a:solidFill>
           <a:ln>
             <a:noFill/>
@@ -13413,7 +13413,7 @@
             <a:r>
               <a:rPr sz="1500" b="1" i="0">
                 <a:solidFill>
-                  <a:srgbClr val="166534"/>
+                  <a:srgbClr val="A5335F"/>
                 </a:solidFill>
                 <a:latin typeface="Verdana"/>
               </a:rPr>
@@ -13533,7 +13533,7 @@
             </a:avLst>
           </a:prstGeom>
           <a:solidFill>
-            <a:srgbClr val="E3F1E7"/>
+            <a:srgbClr val="FCE9F0"/>
           </a:solidFill>
           <a:ln>
             <a:noFill/>
@@ -13590,7 +13590,7 @@
             <a:r>
               <a:rPr sz="1500" b="1" i="0">
                 <a:solidFill>
-                  <a:srgbClr val="166534"/>
+                  <a:srgbClr val="A5335F"/>
                 </a:solidFill>
                 <a:latin typeface="Verdana"/>
               </a:rPr>
@@ -13710,7 +13710,7 @@
             </a:avLst>
           </a:prstGeom>
           <a:solidFill>
-            <a:srgbClr val="E3F1E7"/>
+            <a:srgbClr val="FCE9F0"/>
           </a:solidFill>
           <a:ln>
             <a:noFill/>
@@ -13767,7 +13767,7 @@
             <a:r>
               <a:rPr sz="1500" b="1" i="0">
                 <a:solidFill>
-                  <a:srgbClr val="166534"/>
+                  <a:srgbClr val="A5335F"/>
                 </a:solidFill>
                 <a:latin typeface="Verdana"/>
               </a:rPr>
@@ -13992,7 +13992,7 @@
             <a:r>
               <a:rPr sz="1300" b="1" i="0" spc="156">
                 <a:solidFill>
-                  <a:srgbClr val="166534"/>
+                  <a:srgbClr val="A5335F"/>
                 </a:solidFill>
                 <a:latin typeface="Verdana"/>
               </a:rPr>
@@ -14142,7 +14142,7 @@
             </a:avLst>
           </a:prstGeom>
           <a:solidFill>
-            <a:srgbClr val="E3F1E7"/>
+            <a:srgbClr val="FCE9F0"/>
           </a:solidFill>
           <a:ln>
             <a:noFill/>
@@ -14199,7 +14199,7 @@
             <a:r>
               <a:rPr sz="1500" b="1" i="0">
                 <a:solidFill>
-                  <a:srgbClr val="166534"/>
+                  <a:srgbClr val="A5335F"/>
                 </a:solidFill>
                 <a:latin typeface="Verdana"/>
               </a:rPr>
@@ -14310,7 +14310,7 @@
             </a:avLst>
           </a:prstGeom>
           <a:solidFill>
-            <a:srgbClr val="E3F1E7"/>
+            <a:srgbClr val="FCE9F0"/>
           </a:solidFill>
           <a:ln>
             <a:noFill/>
@@ -14367,7 +14367,7 @@
             <a:r>
               <a:rPr sz="1500" b="1" i="0">
                 <a:solidFill>
-                  <a:srgbClr val="166534"/>
+                  <a:srgbClr val="A5335F"/>
                 </a:solidFill>
                 <a:latin typeface="Verdana"/>
               </a:rPr>
@@ -14478,7 +14478,7 @@
             </a:avLst>
           </a:prstGeom>
           <a:solidFill>
-            <a:srgbClr val="E3F1E7"/>
+            <a:srgbClr val="FCE9F0"/>
           </a:solidFill>
           <a:ln>
             <a:noFill/>
@@ -14535,7 +14535,7 @@
             <a:r>
               <a:rPr sz="1500" b="1" i="0">
                 <a:solidFill>
-                  <a:srgbClr val="166534"/>
+                  <a:srgbClr val="A5335F"/>
                 </a:solidFill>
                 <a:latin typeface="Verdana"/>
               </a:rPr>
@@ -14646,7 +14646,7 @@
             </a:avLst>
           </a:prstGeom>
           <a:solidFill>
-            <a:srgbClr val="E3F1E7"/>
+            <a:srgbClr val="FCE9F0"/>
           </a:solidFill>
           <a:ln>
             <a:noFill/>
@@ -14703,7 +14703,7 @@
             <a:r>
               <a:rPr sz="1500" b="1" i="0">
                 <a:solidFill>
-                  <a:srgbClr val="166534"/>
+                  <a:srgbClr val="A5335F"/>
                 </a:solidFill>
                 <a:latin typeface="Verdana"/>
               </a:rPr>
@@ -14919,7 +14919,7 @@
             <a:r>
               <a:rPr sz="1300" b="1" i="0" spc="156">
                 <a:solidFill>
-                  <a:srgbClr val="166534"/>
+                  <a:srgbClr val="A5335F"/>
                 </a:solidFill>
                 <a:latin typeface="Verdana"/>
               </a:rPr>
@@ -15069,7 +15069,7 @@
             </a:avLst>
           </a:prstGeom>
           <a:solidFill>
-            <a:srgbClr val="E3F1E7"/>
+            <a:srgbClr val="FCE9F0"/>
           </a:solidFill>
           <a:ln>
             <a:noFill/>
@@ -15126,7 +15126,7 @@
             <a:r>
               <a:rPr sz="1500" b="1" i="0">
                 <a:solidFill>
-                  <a:srgbClr val="166534"/>
+                  <a:srgbClr val="A5335F"/>
                 </a:solidFill>
                 <a:latin typeface="Verdana"/>
               </a:rPr>
@@ -15246,7 +15246,7 @@
             </a:avLst>
           </a:prstGeom>
           <a:solidFill>
-            <a:srgbClr val="E3F1E7"/>
+            <a:srgbClr val="FCE9F0"/>
           </a:solidFill>
           <a:ln>
             <a:noFill/>
@@ -15303,7 +15303,7 @@
             <a:r>
               <a:rPr sz="1500" b="1" i="0">
                 <a:solidFill>
-                  <a:srgbClr val="166534"/>
+                  <a:srgbClr val="A5335F"/>
                 </a:solidFill>
                 <a:latin typeface="Verdana"/>
               </a:rPr>
@@ -15423,7 +15423,7 @@
             </a:avLst>
           </a:prstGeom>
           <a:solidFill>
-            <a:srgbClr val="E3F1E7"/>
+            <a:srgbClr val="FCE9F0"/>
           </a:solidFill>
           <a:ln>
             <a:noFill/>
@@ -15480,7 +15480,7 @@
             <a:r>
               <a:rPr sz="1500" b="1" i="0">
                 <a:solidFill>
-                  <a:srgbClr val="166534"/>
+                  <a:srgbClr val="A5335F"/>
                 </a:solidFill>
                 <a:latin typeface="Verdana"/>
               </a:rPr>
@@ -15600,7 +15600,7 @@
             </a:avLst>
           </a:prstGeom>
           <a:solidFill>
-            <a:srgbClr val="E3F1E7"/>
+            <a:srgbClr val="FCE9F0"/>
           </a:solidFill>
           <a:ln>
             <a:noFill/>
@@ -15657,7 +15657,7 @@
             <a:r>
               <a:rPr sz="1500" b="1" i="0">
                 <a:solidFill>
-                  <a:srgbClr val="166534"/>
+                  <a:srgbClr val="A5335F"/>
                 </a:solidFill>
                 <a:latin typeface="Verdana"/>
               </a:rPr>

--- a/assets/powerpoints/module-nouvelles/B2-expliquer-un-mot-dans-ses-mots.pptx
+++ b/assets/powerpoints/module-nouvelles/B2-expliquer-un-mot-dans-ses-mots.pptx
@@ -11394,7 +11394,7 @@
                 </a:solidFill>
                 <a:latin typeface="Verdana"/>
               </a:rPr>
-              <a:t>EN APPRENDRE PLUS</a:t>
+              <a:t>OUVRIR LA MINI-LEÇON</a:t>
             </a:r>
           </a:p>
         </p:txBody>
